--- a/dist/초1/국어/대화와문학/초1_국어_대화와문학_02_동시읽고느낌말하기_학생용.pptx
+++ b/dist/초1/국어/대화와문학/초1_국어_대화와문학_02_동시읽고느낌말하기_학생용.pptx
@@ -119,19 +119,19 @@
   <p:extLst>
     <p:ext uri="{521415D9-36F7-43E2-AB2F-B90AF26B5E84}">
       <p14:sectionLst xmlns:p14="http://schemas.microsoft.com/office/powerpoint/2010/main">
-        <p14:section name="도입" id="{7e392775-a333-6bdd-3b8b-97810cd48398}">
+        <p14:section name="도입" id="{323ca579-9ce2-2f83-e0a7-23224b48ca72}">
           <p14:sldIdLst>
             <p14:sldId id="256"/>
             <p14:sldId id="257"/>
           </p14:sldIdLst>
         </p14:section>
-        <p14:section name="개념" id="{b25f0700-e7ee-d714-ba01-cabfe9d449a3}">
+        <p14:section name="개념" id="{1d3d8861-9099-56c5-57ec-50a723b37b66}">
           <p14:sldIdLst>
             <p14:sldId id="258"/>
             <p14:sldId id="259"/>
           </p14:sldIdLst>
         </p14:section>
-        <p14:section name="연습" id="{e3880348-2d95-9ae1-f1a5-2ec4bd4eb3ba}">
+        <p14:section name="연습" id="{daa02f09-2a90-1129-f68a-54aa99a73af9}">
           <p14:sldIdLst>
             <p14:sldId id="260"/>
             <p14:sldId id="261"/>
@@ -140,18 +140,18 @@
             <p14:sldId id="264"/>
           </p14:sldIdLst>
         </p14:section>
-        <p14:section name="확인" id="{14963fec-f770-3671-2de2-5ec9e9bd5d06}">
+        <p14:section name="확인" id="{fe3423dd-7ba4-0db4-f849-00e20c5ecc9f}">
           <p14:sldIdLst>
             <p14:sldId id="265"/>
             <p14:sldId id="266"/>
           </p14:sldIdLst>
         </p14:section>
-        <p14:section name="정리" id="{331ed9b6-ef43-4bbd-2a17-1b1a2816d8ce}">
+        <p14:section name="정리" id="{4f95f904-3e31-7124-f828-a3ed75086a79}">
           <p14:sldIdLst>
             <p14:sldId id="267"/>
           </p14:sldIdLst>
         </p14:section>
-        <p14:section name="보충" id="{b50de4d5-a749-4f02-0170-2fa8b90e3836}">
+        <p14:section name="보충" id="{9f999d85-5c7d-2102-e36b-5be1eb034145}">
           <p14:sldIdLst>
             <p14:sldId id="268"/>
           </p14:sldIdLst>

--- a/dist/초1/국어/대화와문학/초1_국어_대화와문학_02_동시읽고느낌말하기_학생용.pptx
+++ b/dist/초1/국어/대화와문학/초1_국어_대화와문학_02_동시읽고느낌말하기_학생용.pptx
@@ -119,19 +119,19 @@
   <p:extLst>
     <p:ext uri="{521415D9-36F7-43E2-AB2F-B90AF26B5E84}">
       <p14:sectionLst xmlns:p14="http://schemas.microsoft.com/office/powerpoint/2010/main">
-        <p14:section name="도입" id="{323ca579-9ce2-2f83-e0a7-23224b48ca72}">
+        <p14:section name="도입" id="{823bdc9a-0f7a-ea6b-8c5c-9ae67d348cfc}">
           <p14:sldIdLst>
             <p14:sldId id="256"/>
             <p14:sldId id="257"/>
           </p14:sldIdLst>
         </p14:section>
-        <p14:section name="개념" id="{1d3d8861-9099-56c5-57ec-50a723b37b66}">
+        <p14:section name="개념" id="{dc94a6e1-97ad-8f7f-1f43-37d69f643fb3}">
           <p14:sldIdLst>
             <p14:sldId id="258"/>
             <p14:sldId id="259"/>
           </p14:sldIdLst>
         </p14:section>
-        <p14:section name="연습" id="{daa02f09-2a90-1129-f68a-54aa99a73af9}">
+        <p14:section name="연습" id="{160554ee-4914-91c9-3a10-10c3fb697619}">
           <p14:sldIdLst>
             <p14:sldId id="260"/>
             <p14:sldId id="261"/>
@@ -140,18 +140,18 @@
             <p14:sldId id="264"/>
           </p14:sldIdLst>
         </p14:section>
-        <p14:section name="확인" id="{fe3423dd-7ba4-0db4-f849-00e20c5ecc9f}">
+        <p14:section name="확인" id="{ef3d523a-20e0-6261-151a-4a45b2d14e3d}">
           <p14:sldIdLst>
             <p14:sldId id="265"/>
             <p14:sldId id="266"/>
           </p14:sldIdLst>
         </p14:section>
-        <p14:section name="정리" id="{4f95f904-3e31-7124-f828-a3ed75086a79}">
+        <p14:section name="정리" id="{cb63c1a7-9ad5-a0ff-3ece-c2c3f29486af}">
           <p14:sldIdLst>
             <p14:sldId id="267"/>
           </p14:sldIdLst>
         </p14:section>
-        <p14:section name="보충" id="{9f999d85-5c7d-2102-e36b-5be1eb034145}">
+        <p14:section name="보충" id="{b477220d-92a8-aef1-b852-9d93a57ad076}">
           <p14:sldIdLst>
             <p14:sldId id="268"/>
           </p14:sldIdLst>
@@ -2699,7 +2699,7 @@
               <a:buNone/>
             </a:pPr>
             <a:r>
-              <a:rPr lang="ko-KR" altLang="en-US" sz="5000" b="1" dirty="0">
+              <a:rPr lang="ko-KR" altLang="en-US" sz="4800" b="1" dirty="0">
                 <a:solidFill>
                   <a:srgbClr val="FFFFFF"/>
                 </a:solidFill>
